--- a/output/ppt_optimized/食光菜谱系统_课程汇报_优化版.pptx
+++ b/output/ppt_optimized/食光菜谱系统_课程汇报_优化版.pptx
@@ -32,7 +32,6 @@
     <p:sldId id="280" r:id="rId31"/>
     <p:sldId id="281" r:id="rId32"/>
     <p:sldId id="282" r:id="rId33"/>
-    <p:sldId id="283" r:id="rId34"/>
   </p:sldIdLst>
   <p:sldSz cx="12191695" cy="6858000" type="screen4x3"/>
   <p:notesSz cx="6858000" cy="9144000"/>
@@ -3108,14 +3107,6 @@
 <file path=ppt/slides/slide1.xml><?xml version="1.0" encoding="utf-8"?>
 <p:sld xmlns:a="http://schemas.openxmlformats.org/drawingml/2006/main" xmlns:p="http://schemas.openxmlformats.org/presentationml/2006/main" xmlns:r="http://schemas.openxmlformats.org/officeDocument/2006/relationships">
   <p:cSld>
-    <p:bg>
-      <p:bgPr>
-        <a:solidFill>
-          <a:srgbClr val="3D2B1F"/>
-        </a:solidFill>
-        <a:effectLst/>
-      </p:bgPr>
-    </p:bg>
     <p:spTree>
       <p:nvGrpSpPr>
         <p:cNvPr id="1" name=""/>
@@ -3551,7 +3542,7 @@
               </a:defRPr>
             </a:pPr>
             <a:r>
-              <a:t>1/28</a:t>
+              <a:t>1/27</a:t>
             </a:r>
           </a:p>
         </p:txBody>
@@ -3567,14 +3558,6 @@
 <file path=ppt/slides/slide10.xml><?xml version="1.0" encoding="utf-8"?>
 <p:sld xmlns:a="http://schemas.openxmlformats.org/drawingml/2006/main" xmlns:p="http://schemas.openxmlformats.org/presentationml/2006/main" xmlns:r="http://schemas.openxmlformats.org/officeDocument/2006/relationships">
   <p:cSld>
-    <p:bg>
-      <p:bgPr>
-        <a:solidFill>
-          <a:srgbClr val="FFFAF5"/>
-        </a:solidFill>
-        <a:effectLst/>
-      </p:bgPr>
-    </p:bg>
     <p:spTree>
       <p:nvGrpSpPr>
         <p:cNvPr id="1" name=""/>
@@ -3871,7 +3854,7 @@
               </a:defRPr>
             </a:pPr>
             <a:r>
-              <a:t>9/28</a:t>
+              <a:t>9/27</a:t>
             </a:r>
           </a:p>
         </p:txBody>
@@ -4972,14 +4955,6 @@
 <file path=ppt/slides/slide11.xml><?xml version="1.0" encoding="utf-8"?>
 <p:sld xmlns:a="http://schemas.openxmlformats.org/drawingml/2006/main" xmlns:p="http://schemas.openxmlformats.org/presentationml/2006/main" xmlns:r="http://schemas.openxmlformats.org/officeDocument/2006/relationships">
   <p:cSld>
-    <p:bg>
-      <p:bgPr>
-        <a:solidFill>
-          <a:srgbClr val="FFFAF5"/>
-        </a:solidFill>
-        <a:effectLst/>
-      </p:bgPr>
-    </p:bg>
     <p:spTree>
       <p:nvGrpSpPr>
         <p:cNvPr id="1" name=""/>
@@ -5276,7 +5251,7 @@
               </a:defRPr>
             </a:pPr>
             <a:r>
-              <a:t>10/28</a:t>
+              <a:t>10/27</a:t>
             </a:r>
           </a:p>
         </p:txBody>
@@ -6238,14 +6213,6 @@
 <file path=ppt/slides/slide12.xml><?xml version="1.0" encoding="utf-8"?>
 <p:sld xmlns:a="http://schemas.openxmlformats.org/drawingml/2006/main" xmlns:p="http://schemas.openxmlformats.org/presentationml/2006/main" xmlns:r="http://schemas.openxmlformats.org/officeDocument/2006/relationships">
   <p:cSld>
-    <p:bg>
-      <p:bgPr>
-        <a:solidFill>
-          <a:srgbClr val="FFFAF5"/>
-        </a:solidFill>
-        <a:effectLst/>
-      </p:bgPr>
-    </p:bg>
     <p:spTree>
       <p:nvGrpSpPr>
         <p:cNvPr id="1" name=""/>
@@ -6542,7 +6509,7 @@
               </a:defRPr>
             </a:pPr>
             <a:r>
-              <a:t>11/28</a:t>
+              <a:t>11/27</a:t>
             </a:r>
           </a:p>
         </p:txBody>
@@ -7860,14 +7827,6 @@
 <file path=ppt/slides/slide13.xml><?xml version="1.0" encoding="utf-8"?>
 <p:sld xmlns:a="http://schemas.openxmlformats.org/drawingml/2006/main" xmlns:p="http://schemas.openxmlformats.org/presentationml/2006/main" xmlns:r="http://schemas.openxmlformats.org/officeDocument/2006/relationships">
   <p:cSld>
-    <p:bg>
-      <p:bgPr>
-        <a:solidFill>
-          <a:srgbClr val="3D2B1F"/>
-        </a:solidFill>
-        <a:effectLst/>
-      </p:bgPr>
-    </p:bg>
     <p:spTree>
       <p:nvGrpSpPr>
         <p:cNvPr id="1" name=""/>
@@ -8166,7 +8125,7 @@
               </a:defRPr>
             </a:pPr>
             <a:r>
-              <a:t>12/28</a:t>
+              <a:t>12/27</a:t>
             </a:r>
           </a:p>
         </p:txBody>
@@ -8182,14 +8141,6 @@
 <file path=ppt/slides/slide14.xml><?xml version="1.0" encoding="utf-8"?>
 <p:sld xmlns:a="http://schemas.openxmlformats.org/drawingml/2006/main" xmlns:p="http://schemas.openxmlformats.org/presentationml/2006/main" xmlns:r="http://schemas.openxmlformats.org/officeDocument/2006/relationships">
   <p:cSld>
-    <p:bg>
-      <p:bgPr>
-        <a:solidFill>
-          <a:srgbClr val="FFFAF5"/>
-        </a:solidFill>
-        <a:effectLst/>
-      </p:bgPr>
-    </p:bg>
     <p:spTree>
       <p:nvGrpSpPr>
         <p:cNvPr id="1" name=""/>
@@ -8486,7 +8437,7 @@
               </a:defRPr>
             </a:pPr>
             <a:r>
-              <a:t>13/28</a:t>
+              <a:t>13/27</a:t>
             </a:r>
           </a:p>
         </p:txBody>
@@ -9474,14 +9425,6 @@
 <file path=ppt/slides/slide15.xml><?xml version="1.0" encoding="utf-8"?>
 <p:sld xmlns:a="http://schemas.openxmlformats.org/drawingml/2006/main" xmlns:p="http://schemas.openxmlformats.org/presentationml/2006/main" xmlns:r="http://schemas.openxmlformats.org/officeDocument/2006/relationships">
   <p:cSld>
-    <p:bg>
-      <p:bgPr>
-        <a:solidFill>
-          <a:srgbClr val="FFFAF5"/>
-        </a:solidFill>
-        <a:effectLst/>
-      </p:bgPr>
-    </p:bg>
     <p:spTree>
       <p:nvGrpSpPr>
         <p:cNvPr id="1" name=""/>
@@ -9778,7 +9721,7 @@
               </a:defRPr>
             </a:pPr>
             <a:r>
-              <a:t>14/28</a:t>
+              <a:t>14/27</a:t>
             </a:r>
           </a:p>
         </p:txBody>
@@ -10606,14 +10549,6 @@
 <file path=ppt/slides/slide16.xml><?xml version="1.0" encoding="utf-8"?>
 <p:sld xmlns:a="http://schemas.openxmlformats.org/drawingml/2006/main" xmlns:p="http://schemas.openxmlformats.org/presentationml/2006/main" xmlns:r="http://schemas.openxmlformats.org/officeDocument/2006/relationships">
   <p:cSld>
-    <p:bg>
-      <p:bgPr>
-        <a:solidFill>
-          <a:srgbClr val="3D2B1F"/>
-        </a:solidFill>
-        <a:effectLst/>
-      </p:bgPr>
-    </p:bg>
     <p:spTree>
       <p:nvGrpSpPr>
         <p:cNvPr id="1" name=""/>
@@ -10912,7 +10847,7 @@
               </a:defRPr>
             </a:pPr>
             <a:r>
-              <a:t>15/28</a:t>
+              <a:t>15/27</a:t>
             </a:r>
           </a:p>
         </p:txBody>
@@ -10928,14 +10863,6 @@
 <file path=ppt/slides/slide17.xml><?xml version="1.0" encoding="utf-8"?>
 <p:sld xmlns:a="http://schemas.openxmlformats.org/drawingml/2006/main" xmlns:p="http://schemas.openxmlformats.org/presentationml/2006/main" xmlns:r="http://schemas.openxmlformats.org/officeDocument/2006/relationships">
   <p:cSld>
-    <p:bg>
-      <p:bgPr>
-        <a:solidFill>
-          <a:srgbClr val="FFFAF5"/>
-        </a:solidFill>
-        <a:effectLst/>
-      </p:bgPr>
-    </p:bg>
     <p:spTree>
       <p:nvGrpSpPr>
         <p:cNvPr id="1" name=""/>
@@ -11232,7 +11159,7 @@
               </a:defRPr>
             </a:pPr>
             <a:r>
-              <a:t>16/28</a:t>
+              <a:t>16/27</a:t>
             </a:r>
           </a:p>
         </p:txBody>
@@ -12412,14 +12339,6 @@
 <file path=ppt/slides/slide18.xml><?xml version="1.0" encoding="utf-8"?>
 <p:sld xmlns:a="http://schemas.openxmlformats.org/drawingml/2006/main" xmlns:p="http://schemas.openxmlformats.org/presentationml/2006/main" xmlns:r="http://schemas.openxmlformats.org/officeDocument/2006/relationships">
   <p:cSld>
-    <p:bg>
-      <p:bgPr>
-        <a:solidFill>
-          <a:srgbClr val="FFFAF5"/>
-        </a:solidFill>
-        <a:effectLst/>
-      </p:bgPr>
-    </p:bg>
     <p:spTree>
       <p:nvGrpSpPr>
         <p:cNvPr id="1" name=""/>
@@ -12716,7 +12635,7 @@
               </a:defRPr>
             </a:pPr>
             <a:r>
-              <a:t>17/28</a:t>
+              <a:t>17/27</a:t>
             </a:r>
           </a:p>
         </p:txBody>
@@ -13642,14 +13561,6 @@
 <file path=ppt/slides/slide19.xml><?xml version="1.0" encoding="utf-8"?>
 <p:sld xmlns:a="http://schemas.openxmlformats.org/drawingml/2006/main" xmlns:p="http://schemas.openxmlformats.org/presentationml/2006/main" xmlns:r="http://schemas.openxmlformats.org/officeDocument/2006/relationships">
   <p:cSld>
-    <p:bg>
-      <p:bgPr>
-        <a:solidFill>
-          <a:srgbClr val="FFFAF5"/>
-        </a:solidFill>
-        <a:effectLst/>
-      </p:bgPr>
-    </p:bg>
     <p:spTree>
       <p:nvGrpSpPr>
         <p:cNvPr id="1" name=""/>
@@ -13946,7 +13857,7 @@
               </a:defRPr>
             </a:pPr>
             <a:r>
-              <a:t>18/28</a:t>
+              <a:t>18/27</a:t>
             </a:r>
           </a:p>
         </p:txBody>
@@ -15006,14 +14917,6 @@
 <file path=ppt/slides/slide2.xml><?xml version="1.0" encoding="utf-8"?>
 <p:sld xmlns:a="http://schemas.openxmlformats.org/drawingml/2006/main" xmlns:p="http://schemas.openxmlformats.org/presentationml/2006/main" xmlns:r="http://schemas.openxmlformats.org/officeDocument/2006/relationships">
   <p:cSld>
-    <p:bg>
-      <p:bgPr>
-        <a:solidFill>
-          <a:srgbClr val="FFFAF5"/>
-        </a:solidFill>
-        <a:effectLst/>
-      </p:bgPr>
-    </p:bg>
     <p:spTree>
       <p:nvGrpSpPr>
         <p:cNvPr id="1" name=""/>
@@ -16418,7 +16321,7 @@
               </a:defRPr>
             </a:pPr>
             <a:r>
-              <a:t>07</a:t>
+              <a:t/>
             </a:r>
           </a:p>
         </p:txBody>
@@ -16500,7 +16403,7 @@
               </a:defRPr>
             </a:pPr>
             <a:r>
-              <a:t>AI 工具辅助开发总结</a:t>
+              <a:t/>
             </a:r>
           </a:p>
         </p:txBody>
@@ -16542,7 +16445,7 @@
               </a:defRPr>
             </a:pPr>
             <a:r>
-              <a:t>AI 工具使用总览与辅助开发作用总结</a:t>
+              <a:t/>
             </a:r>
           </a:p>
         </p:txBody>
@@ -16584,7 +16487,7 @@
               </a:defRPr>
             </a:pPr>
             <a:r>
-              <a:t>2/28</a:t>
+              <a:t>2/27</a:t>
             </a:r>
           </a:p>
         </p:txBody>
@@ -16600,14 +16503,6 @@
 <file path=ppt/slides/slide20.xml><?xml version="1.0" encoding="utf-8"?>
 <p:sld xmlns:a="http://schemas.openxmlformats.org/drawingml/2006/main" xmlns:p="http://schemas.openxmlformats.org/presentationml/2006/main" xmlns:r="http://schemas.openxmlformats.org/officeDocument/2006/relationships">
   <p:cSld>
-    <p:bg>
-      <p:bgPr>
-        <a:solidFill>
-          <a:srgbClr val="FFFAF5"/>
-        </a:solidFill>
-        <a:effectLst/>
-      </p:bgPr>
-    </p:bg>
     <p:spTree>
       <p:nvGrpSpPr>
         <p:cNvPr id="1" name=""/>
@@ -16904,7 +16799,7 @@
               </a:defRPr>
             </a:pPr>
             <a:r>
-              <a:t>19/28</a:t>
+              <a:t>19/27</a:t>
             </a:r>
           </a:p>
         </p:txBody>
@@ -19023,14 +18918,6 @@
 <file path=ppt/slides/slide21.xml><?xml version="1.0" encoding="utf-8"?>
 <p:sld xmlns:a="http://schemas.openxmlformats.org/drawingml/2006/main" xmlns:p="http://schemas.openxmlformats.org/presentationml/2006/main" xmlns:r="http://schemas.openxmlformats.org/officeDocument/2006/relationships">
   <p:cSld>
-    <p:bg>
-      <p:bgPr>
-        <a:solidFill>
-          <a:srgbClr val="3D2B1F"/>
-        </a:solidFill>
-        <a:effectLst/>
-      </p:bgPr>
-    </p:bg>
     <p:spTree>
       <p:nvGrpSpPr>
         <p:cNvPr id="1" name=""/>
@@ -19329,7 +19216,7 @@
               </a:defRPr>
             </a:pPr>
             <a:r>
-              <a:t>20/28</a:t>
+              <a:t>20/27</a:t>
             </a:r>
           </a:p>
         </p:txBody>
@@ -19345,14 +19232,6 @@
 <file path=ppt/slides/slide22.xml><?xml version="1.0" encoding="utf-8"?>
 <p:sld xmlns:a="http://schemas.openxmlformats.org/drawingml/2006/main" xmlns:p="http://schemas.openxmlformats.org/presentationml/2006/main" xmlns:r="http://schemas.openxmlformats.org/officeDocument/2006/relationships">
   <p:cSld>
-    <p:bg>
-      <p:bgPr>
-        <a:solidFill>
-          <a:srgbClr val="FFFAF5"/>
-        </a:solidFill>
-        <a:effectLst/>
-      </p:bgPr>
-    </p:bg>
     <p:spTree>
       <p:nvGrpSpPr>
         <p:cNvPr id="1" name=""/>
@@ -19649,7 +19528,7 @@
               </a:defRPr>
             </a:pPr>
             <a:r>
-              <a:t>21/28</a:t>
+              <a:t>21/27</a:t>
             </a:r>
           </a:p>
         </p:txBody>
@@ -20775,14 +20654,6 @@
 <file path=ppt/slides/slide23.xml><?xml version="1.0" encoding="utf-8"?>
 <p:sld xmlns:a="http://schemas.openxmlformats.org/drawingml/2006/main" xmlns:p="http://schemas.openxmlformats.org/presentationml/2006/main" xmlns:r="http://schemas.openxmlformats.org/officeDocument/2006/relationships">
   <p:cSld>
-    <p:bg>
-      <p:bgPr>
-        <a:solidFill>
-          <a:srgbClr val="FFFAF5"/>
-        </a:solidFill>
-        <a:effectLst/>
-      </p:bgPr>
-    </p:bg>
     <p:spTree>
       <p:nvGrpSpPr>
         <p:cNvPr id="1" name=""/>
@@ -21079,7 +20950,7 @@
               </a:defRPr>
             </a:pPr>
             <a:r>
-              <a:t>22/28</a:t>
+              <a:t>22/27</a:t>
             </a:r>
           </a:p>
         </p:txBody>
@@ -22173,14 +22044,6 @@
 <file path=ppt/slides/slide24.xml><?xml version="1.0" encoding="utf-8"?>
 <p:sld xmlns:a="http://schemas.openxmlformats.org/drawingml/2006/main" xmlns:p="http://schemas.openxmlformats.org/presentationml/2006/main" xmlns:r="http://schemas.openxmlformats.org/officeDocument/2006/relationships">
   <p:cSld>
-    <p:bg>
-      <p:bgPr>
-        <a:solidFill>
-          <a:srgbClr val="FFFAF5"/>
-        </a:solidFill>
-        <a:effectLst/>
-      </p:bgPr>
-    </p:bg>
     <p:spTree>
       <p:nvGrpSpPr>
         <p:cNvPr id="1" name=""/>
@@ -22477,7 +22340,7 @@
               </a:defRPr>
             </a:pPr>
             <a:r>
-              <a:t>23/28</a:t>
+              <a:t>23/27</a:t>
             </a:r>
           </a:p>
         </p:txBody>
@@ -23533,14 +23396,6 @@
 <file path=ppt/slides/slide25.xml><?xml version="1.0" encoding="utf-8"?>
 <p:sld xmlns:a="http://schemas.openxmlformats.org/drawingml/2006/main" xmlns:p="http://schemas.openxmlformats.org/presentationml/2006/main" xmlns:r="http://schemas.openxmlformats.org/officeDocument/2006/relationships">
   <p:cSld>
-    <p:bg>
-      <p:bgPr>
-        <a:solidFill>
-          <a:srgbClr val="3D2B1F"/>
-        </a:solidFill>
-        <a:effectLst/>
-      </p:bgPr>
-    </p:bg>
     <p:spTree>
       <p:nvGrpSpPr>
         <p:cNvPr id="1" name=""/>
@@ -23839,7 +23694,7 @@
               </a:defRPr>
             </a:pPr>
             <a:r>
-              <a:t>24/28</a:t>
+              <a:t>24/27</a:t>
             </a:r>
           </a:p>
         </p:txBody>
@@ -23855,14 +23710,6 @@
 <file path=ppt/slides/slide26.xml><?xml version="1.0" encoding="utf-8"?>
 <p:sld xmlns:a="http://schemas.openxmlformats.org/drawingml/2006/main" xmlns:p="http://schemas.openxmlformats.org/presentationml/2006/main" xmlns:r="http://schemas.openxmlformats.org/officeDocument/2006/relationships">
   <p:cSld>
-    <p:bg>
-      <p:bgPr>
-        <a:solidFill>
-          <a:srgbClr val="FFFAF5"/>
-        </a:solidFill>
-        <a:effectLst/>
-      </p:bgPr>
-    </p:bg>
     <p:spTree>
       <p:nvGrpSpPr>
         <p:cNvPr id="1" name=""/>
@@ -24159,7 +24006,7 @@
               </a:defRPr>
             </a:pPr>
             <a:r>
-              <a:t>25/28</a:t>
+              <a:t>25/27</a:t>
             </a:r>
           </a:p>
         </p:txBody>
@@ -25556,14 +25403,6 @@
 <file path=ppt/slides/slide27.xml><?xml version="1.0" encoding="utf-8"?>
 <p:sld xmlns:a="http://schemas.openxmlformats.org/drawingml/2006/main" xmlns:p="http://schemas.openxmlformats.org/presentationml/2006/main" xmlns:r="http://schemas.openxmlformats.org/officeDocument/2006/relationships">
   <p:cSld>
-    <p:bg>
-      <p:bgPr>
-        <a:solidFill>
-          <a:srgbClr val="3D2B1F"/>
-        </a:solidFill>
-        <a:effectLst/>
-      </p:bgPr>
-    </p:bg>
     <p:spTree>
       <p:nvGrpSpPr>
         <p:cNvPr id="1" name=""/>
@@ -25579,8 +25418,8 @@
         </p:nvSpPr>
         <p:spPr>
           <a:xfrm>
-            <a:off x="914400" y="2286000"/>
-            <a:ext cx="73152" cy="1645920"/>
+            <a:off x="0" y="0"/>
+            <a:ext cx="12188952" cy="36576"/>
           </a:xfrm>
           <a:prstGeom prst="rect">
             <a:avLst/>
@@ -25616,142 +25455,16 @@
       </p:sp>
       <p:sp>
         <p:nvSpPr>
-          <p:cNvPr id="3" name="TextBox 2"/>
-          <p:cNvSpPr txBox="1"/>
-          <p:nvPr/>
-        </p:nvSpPr>
-        <p:spPr>
-          <a:xfrm>
-            <a:off x="1371600" y="2286000"/>
-            <a:ext cx="1371600" cy="548640"/>
-          </a:xfrm>
-          <a:prstGeom prst="rect">
-            <a:avLst/>
-          </a:prstGeom>
-          <a:noFill/>
-        </p:spPr>
-        <p:txBody>
-          <a:bodyPr wrap="square">
-            <a:spAutoFit/>
-          </a:bodyPr>
-          <a:lstStyle/>
-          <a:p>
-            <a:pPr algn="l">
-              <a:lnSpc>
-                <a:spcPts val="5460"/>
-              </a:lnSpc>
-              <a:spcAft>
-                <a:spcPts val="200"/>
-              </a:spcAft>
-              <a:defRPr sz="4200" b="1">
-                <a:solidFill>
-                  <a:srgbClr val="FF6B35"/>
-                </a:solidFill>
-                <a:latin typeface="Microsoft YaHei"/>
-              </a:defRPr>
-            </a:pPr>
-            <a:r>
-              <a:t>07</a:t>
-            </a:r>
-          </a:p>
-        </p:txBody>
-      </p:sp>
-      <p:sp>
-        <p:nvSpPr>
-          <p:cNvPr id="4" name="TextBox 3"/>
-          <p:cNvSpPr txBox="1"/>
-          <p:nvPr/>
-        </p:nvSpPr>
-        <p:spPr>
-          <a:xfrm>
-            <a:off x="1371600" y="2880360"/>
-            <a:ext cx="7315200" cy="731520"/>
-          </a:xfrm>
-          <a:prstGeom prst="rect">
-            <a:avLst/>
-          </a:prstGeom>
-          <a:noFill/>
-        </p:spPr>
-        <p:txBody>
-          <a:bodyPr wrap="square">
-            <a:spAutoFit/>
-          </a:bodyPr>
-          <a:lstStyle/>
-          <a:p>
-            <a:pPr algn="l">
-              <a:lnSpc>
-                <a:spcPts val="4160"/>
-              </a:lnSpc>
-              <a:spcAft>
-                <a:spcPts val="200"/>
-              </a:spcAft>
-              <a:defRPr sz="3200" b="1">
-                <a:solidFill>
-                  <a:srgbClr val="FFFFFF"/>
-                </a:solidFill>
-                <a:latin typeface="Microsoft YaHei"/>
-              </a:defRPr>
-            </a:pPr>
-            <a:r>
-              <a:t>AI 工具辅助开发总结</a:t>
-            </a:r>
-          </a:p>
-        </p:txBody>
-      </p:sp>
-      <p:sp>
-        <p:nvSpPr>
-          <p:cNvPr id="5" name="TextBox 4"/>
-          <p:cNvSpPr txBox="1"/>
-          <p:nvPr/>
-        </p:nvSpPr>
-        <p:spPr>
-          <a:xfrm>
-            <a:off x="1371600" y="3611880"/>
-            <a:ext cx="7315200" cy="457200"/>
-          </a:xfrm>
-          <a:prstGeom prst="rect">
-            <a:avLst/>
-          </a:prstGeom>
-          <a:noFill/>
-        </p:spPr>
-        <p:txBody>
-          <a:bodyPr wrap="square">
-            <a:spAutoFit/>
-          </a:bodyPr>
-          <a:lstStyle/>
-          <a:p>
-            <a:pPr algn="l">
-              <a:lnSpc>
-                <a:spcPts val="1820"/>
-              </a:lnSpc>
-              <a:spcAft>
-                <a:spcPts val="200"/>
-              </a:spcAft>
-              <a:defRPr sz="1400" b="0">
-                <a:solidFill>
-                  <a:srgbClr val="999999"/>
-                </a:solidFill>
-                <a:latin typeface="Microsoft YaHei"/>
-              </a:defRPr>
-            </a:pPr>
-            <a:r>
-              <a:t>AI 工具使用总览与辅助开发作用总结</a:t>
-            </a:r>
-          </a:p>
-        </p:txBody>
-      </p:sp>
-      <p:sp>
-        <p:nvSpPr>
-          <p:cNvPr id="6" name="Rectangle 5"/>
+          <p:cNvPr id="3" name="Rounded Rectangle 2"/>
           <p:cNvSpPr/>
           <p:nvPr/>
         </p:nvSpPr>
         <p:spPr>
           <a:xfrm>
-            <a:off x="914400" y="5029200"/>
-            <a:ext cx="9601200" cy="13716"/>
-          </a:xfrm>
-          <a:prstGeom prst="rect">
+            <a:off x="548640" y="274320"/>
+            <a:ext cx="1645920" cy="320040"/>
+          </a:xfrm>
+          <a:prstGeom prst="roundRect">
             <a:avLst/>
           </a:prstGeom>
           <a:solidFill>
@@ -25785,14 +25498,14 @@
       </p:sp>
       <p:sp>
         <p:nvSpPr>
-          <p:cNvPr id="7" name="TextBox 6"/>
+          <p:cNvPr id="4" name="TextBox 3"/>
           <p:cNvSpPr txBox="1"/>
           <p:nvPr/>
         </p:nvSpPr>
         <p:spPr>
           <a:xfrm>
-            <a:off x="914400" y="5212080"/>
-            <a:ext cx="9601200" cy="274320"/>
+            <a:off x="548640" y="274320"/>
+            <a:ext cx="1645920" cy="320040"/>
           </a:xfrm>
           <a:prstGeom prst="rect">
             <a:avLst/>
@@ -25805,36 +25518,33 @@
           </a:bodyPr>
           <a:lstStyle/>
           <a:p>
-            <a:pPr algn="l">
-              <a:lnSpc>
-                <a:spcPts val="1170"/>
-              </a:lnSpc>
-              <a:spcAft>
-                <a:spcPts val="200"/>
-              </a:spcAft>
-              <a:defRPr sz="900" b="0">
-                <a:solidFill>
-                  <a:srgbClr val="999999"/>
-                </a:solidFill>
-                <a:latin typeface="Microsoft YaHei"/>
-              </a:defRPr>
-            </a:pPr>
-            <a:r>
-              <a:t>基于 Vue + Spring Boot + MySQL 的菜谱分享与管理系统</a:t>
-            </a:r>
-          </a:p>
-        </p:txBody>
-      </p:sp>
-      <p:sp>
-        <p:nvSpPr>
-          <p:cNvPr id="8" name="TextBox 7"/>
+            <a:pPr algn="ctr">
+              <a:spcAft>
+                <a:spcPts val="200"/>
+              </a:spcAft>
+              <a:defRPr sz="1000" b="1">
+                <a:solidFill>
+                  <a:srgbClr val="FFFFFF"/>
+                </a:solidFill>
+                <a:latin typeface="Microsoft YaHei"/>
+              </a:defRPr>
+            </a:pPr>
+            <a:r>
+              <a:t>总结</a:t>
+            </a:r>
+          </a:p>
+        </p:txBody>
+      </p:sp>
+      <p:sp>
+        <p:nvSpPr>
+          <p:cNvPr id="6" name="TextBox 5"/>
           <p:cNvSpPr txBox="1"/>
           <p:nvPr/>
         </p:nvSpPr>
         <p:spPr>
           <a:xfrm>
-            <a:off x="10515600" y="6492240"/>
-            <a:ext cx="1097280" cy="274320"/>
+            <a:off x="548640" y="1097280"/>
+            <a:ext cx="9144000" cy="274320"/>
           </a:xfrm>
           <a:prstGeom prst="rect">
             <a:avLst/>
@@ -25847,68 +25557,42 @@
           </a:bodyPr>
           <a:lstStyle/>
           <a:p>
-            <a:pPr algn="r">
-              <a:lnSpc>
-                <a:spcPts val="1040"/>
-              </a:lnSpc>
-              <a:spcAft>
-                <a:spcPts val="200"/>
-              </a:spcAft>
-              <a:defRPr sz="800" b="0">
-                <a:solidFill>
-                  <a:srgbClr val="999999"/>
-                </a:solidFill>
-                <a:latin typeface="Microsoft YaHei"/>
-              </a:defRPr>
-            </a:pPr>
-            <a:r>
-              <a:t>26/28</a:t>
-            </a:r>
-          </a:p>
-        </p:txBody>
-      </p:sp>
-    </p:spTree>
-  </p:cSld>
-  <p:clrMapOvr>
-    <a:masterClrMapping/>
-  </p:clrMapOvr>
-</p:sld>
-</file>
-
-<file path=ppt/slides/slide28.xml><?xml version="1.0" encoding="utf-8"?>
-<p:sld xmlns:a="http://schemas.openxmlformats.org/drawingml/2006/main" xmlns:p="http://schemas.openxmlformats.org/presentationml/2006/main" xmlns:r="http://schemas.openxmlformats.org/officeDocument/2006/relationships">
-  <p:cSld>
-    <p:bg>
-      <p:bgPr>
-        <a:solidFill>
-          <a:srgbClr val="FFFAF5"/>
-        </a:solidFill>
-        <a:effectLst/>
-      </p:bgPr>
-    </p:bg>
-    <p:spTree>
-      <p:nvGrpSpPr>
-        <p:cNvPr id="1" name=""/>
-        <p:cNvGrpSpPr/>
-        <p:nvPr/>
-      </p:nvGrpSpPr>
-      <p:grpSpPr/>
-      <p:sp>
-        <p:nvSpPr>
-          <p:cNvPr id="2" name="Rectangle 1"/>
+            <a:pPr algn="l">
+              <a:lnSpc>
+                <a:spcPts val="1430"/>
+              </a:lnSpc>
+              <a:spcAft>
+                <a:spcPts val="200"/>
+              </a:spcAft>
+              <a:defRPr sz="1100" b="0">
+                <a:solidFill>
+                  <a:srgbClr val="666666"/>
+                </a:solidFill>
+                <a:latin typeface="Microsoft YaHei"/>
+              </a:defRPr>
+            </a:pPr>
+            <a:r>
+              <a:t>项目收获 + 后续优化方向</a:t>
+            </a:r>
+          </a:p>
+        </p:txBody>
+      </p:sp>
+      <p:sp>
+        <p:nvSpPr>
+          <p:cNvPr id="7" name="Rectangle 6"/>
           <p:cNvSpPr/>
           <p:nvPr/>
         </p:nvSpPr>
         <p:spPr>
           <a:xfrm>
-            <a:off x="0" y="0"/>
-            <a:ext cx="12188952" cy="36576"/>
+            <a:off x="548640" y="1417320"/>
+            <a:ext cx="10972800" cy="9144"/>
           </a:xfrm>
           <a:prstGeom prst="rect">
             <a:avLst/>
           </a:prstGeom>
           <a:solidFill>
-            <a:srgbClr val="FF6B35"/>
+            <a:srgbClr val="E8E0D5"/>
           </a:solidFill>
           <a:ln>
             <a:noFill/>
@@ -25938,57 +25622,14 @@
       </p:sp>
       <p:sp>
         <p:nvSpPr>
-          <p:cNvPr id="3" name="Rounded Rectangle 2"/>
-          <p:cNvSpPr/>
-          <p:nvPr/>
-        </p:nvSpPr>
-        <p:spPr>
-          <a:xfrm>
-            <a:off x="548640" y="274320"/>
-            <a:ext cx="1645920" cy="320040"/>
-          </a:xfrm>
-          <a:prstGeom prst="roundRect">
-            <a:avLst/>
-          </a:prstGeom>
-          <a:solidFill>
-            <a:srgbClr val="FF6B35"/>
-          </a:solidFill>
-          <a:ln>
-            <a:noFill/>
-          </a:ln>
-        </p:spPr>
-        <p:style>
-          <a:lnRef idx="1">
-            <a:schemeClr val="accent1"/>
-          </a:lnRef>
-          <a:fillRef idx="3">
-            <a:schemeClr val="accent1"/>
-          </a:fillRef>
-          <a:effectRef idx="2">
-            <a:schemeClr val="accent1"/>
-          </a:effectRef>
-          <a:fontRef idx="minor">
-            <a:schemeClr val="lt1"/>
-          </a:fontRef>
-        </p:style>
-        <p:txBody>
-          <a:bodyPr rtlCol="0" anchor="ctr"/>
-          <a:lstStyle/>
-          <a:p>
-            <a:pPr algn="ctr"/>
-          </a:p>
-        </p:txBody>
-      </p:sp>
-      <p:sp>
-        <p:nvSpPr>
-          <p:cNvPr id="4" name="TextBox 3"/>
+          <p:cNvPr id="8" name="TextBox 7"/>
           <p:cNvSpPr txBox="1"/>
           <p:nvPr/>
         </p:nvSpPr>
         <p:spPr>
           <a:xfrm>
-            <a:off x="548640" y="274320"/>
-            <a:ext cx="1645920" cy="320040"/>
+            <a:off x="10515600" y="6492240"/>
+            <a:ext cx="1097280" cy="274320"/>
           </a:xfrm>
           <a:prstGeom prst="rect">
             <a:avLst/>
@@ -26001,172 +25642,6 @@
           </a:bodyPr>
           <a:lstStyle/>
           <a:p>
-            <a:pPr algn="ctr">
-              <a:spcAft>
-                <a:spcPts val="200"/>
-              </a:spcAft>
-              <a:defRPr sz="1000" b="1">
-                <a:solidFill>
-                  <a:srgbClr val="FFFFFF"/>
-                </a:solidFill>
-                <a:latin typeface="Microsoft YaHei"/>
-              </a:defRPr>
-            </a:pPr>
-            <a:r>
-              <a:t>07 总结</a:t>
-            </a:r>
-          </a:p>
-        </p:txBody>
-      </p:sp>
-      <p:sp>
-        <p:nvSpPr>
-          <p:cNvPr id="5" name="TextBox 4"/>
-          <p:cNvSpPr txBox="1"/>
-          <p:nvPr/>
-        </p:nvSpPr>
-        <p:spPr>
-          <a:xfrm>
-            <a:off x="548640" y="731520"/>
-            <a:ext cx="9144000" cy="411480"/>
-          </a:xfrm>
-          <a:prstGeom prst="rect">
-            <a:avLst/>
-          </a:prstGeom>
-          <a:noFill/>
-        </p:spPr>
-        <p:txBody>
-          <a:bodyPr wrap="square">
-            <a:spAutoFit/>
-          </a:bodyPr>
-          <a:lstStyle/>
-          <a:p>
-            <a:pPr algn="l">
-              <a:lnSpc>
-                <a:spcPts val="2860"/>
-              </a:lnSpc>
-              <a:spcAft>
-                <a:spcPts val="200"/>
-              </a:spcAft>
-              <a:defRPr sz="2200" b="1">
-                <a:solidFill>
-                  <a:srgbClr val="2D2D2D"/>
-                </a:solidFill>
-                <a:latin typeface="Microsoft YaHei"/>
-              </a:defRPr>
-            </a:pPr>
-            <a:r>
-              <a:t>AI 工具使用总结与项目展望</a:t>
-            </a:r>
-          </a:p>
-        </p:txBody>
-      </p:sp>
-      <p:sp>
-        <p:nvSpPr>
-          <p:cNvPr id="6" name="TextBox 5"/>
-          <p:cNvSpPr txBox="1"/>
-          <p:nvPr/>
-        </p:nvSpPr>
-        <p:spPr>
-          <a:xfrm>
-            <a:off x="548640" y="1097280"/>
-            <a:ext cx="9144000" cy="274320"/>
-          </a:xfrm>
-          <a:prstGeom prst="rect">
-            <a:avLst/>
-          </a:prstGeom>
-          <a:noFill/>
-        </p:spPr>
-        <p:txBody>
-          <a:bodyPr wrap="square">
-            <a:spAutoFit/>
-          </a:bodyPr>
-          <a:lstStyle/>
-          <a:p>
-            <a:pPr algn="l">
-              <a:lnSpc>
-                <a:spcPts val="1430"/>
-              </a:lnSpc>
-              <a:spcAft>
-                <a:spcPts val="200"/>
-              </a:spcAft>
-              <a:defRPr sz="1100" b="0">
-                <a:solidFill>
-                  <a:srgbClr val="666666"/>
-                </a:solidFill>
-                <a:latin typeface="Microsoft YaHei"/>
-              </a:defRPr>
-            </a:pPr>
-            <a:r>
-              <a:t>AI 提效工具 + 项目收获 + 后续优化方向</a:t>
-            </a:r>
-          </a:p>
-        </p:txBody>
-      </p:sp>
-      <p:sp>
-        <p:nvSpPr>
-          <p:cNvPr id="7" name="Rectangle 6"/>
-          <p:cNvSpPr/>
-          <p:nvPr/>
-        </p:nvSpPr>
-        <p:spPr>
-          <a:xfrm>
-            <a:off x="548640" y="1417320"/>
-            <a:ext cx="10972800" cy="9144"/>
-          </a:xfrm>
-          <a:prstGeom prst="rect">
-            <a:avLst/>
-          </a:prstGeom>
-          <a:solidFill>
-            <a:srgbClr val="E8E0D5"/>
-          </a:solidFill>
-          <a:ln>
-            <a:noFill/>
-          </a:ln>
-        </p:spPr>
-        <p:style>
-          <a:lnRef idx="1">
-            <a:schemeClr val="accent1"/>
-          </a:lnRef>
-          <a:fillRef idx="3">
-            <a:schemeClr val="accent1"/>
-          </a:fillRef>
-          <a:effectRef idx="2">
-            <a:schemeClr val="accent1"/>
-          </a:effectRef>
-          <a:fontRef idx="minor">
-            <a:schemeClr val="lt1"/>
-          </a:fontRef>
-        </p:style>
-        <p:txBody>
-          <a:bodyPr rtlCol="0" anchor="ctr"/>
-          <a:lstStyle/>
-          <a:p>
-            <a:pPr algn="ctr"/>
-          </a:p>
-        </p:txBody>
-      </p:sp>
-      <p:sp>
-        <p:nvSpPr>
-          <p:cNvPr id="8" name="TextBox 7"/>
-          <p:cNvSpPr txBox="1"/>
-          <p:nvPr/>
-        </p:nvSpPr>
-        <p:spPr>
-          <a:xfrm>
-            <a:off x="10515600" y="6492240"/>
-            <a:ext cx="1097280" cy="274320"/>
-          </a:xfrm>
-          <a:prstGeom prst="rect">
-            <a:avLst/>
-          </a:prstGeom>
-          <a:noFill/>
-        </p:spPr>
-        <p:txBody>
-          <a:bodyPr wrap="square">
-            <a:spAutoFit/>
-          </a:bodyPr>
-          <a:lstStyle/>
-          <a:p>
             <a:pPr algn="r">
               <a:lnSpc>
                 <a:spcPts val="1040"/>
@@ -26182,7 +25657,7 @@
               </a:defRPr>
             </a:pPr>
             <a:r>
-              <a:t>27/28</a:t>
+              <a:t>27/27</a:t>
             </a:r>
           </a:p>
         </p:txBody>
@@ -26586,124 +26061,6 @@
       </p:graphicFrame>
       <p:sp>
         <p:nvSpPr>
-          <p:cNvPr id="10" name="TextBox 9"/>
-          <p:cNvSpPr txBox="1"/>
-          <p:nvPr/>
-        </p:nvSpPr>
-        <p:spPr>
-          <a:xfrm>
-            <a:off x="548640" y="4389120"/>
-            <a:ext cx="5486400" cy="1828800"/>
-          </a:xfrm>
-          <a:prstGeom prst="rect">
-            <a:avLst/>
-          </a:prstGeom>
-          <a:noFill/>
-        </p:spPr>
-        <p:txBody>
-          <a:bodyPr wrap="square">
-            <a:spAutoFit/>
-          </a:bodyPr>
-          <a:lstStyle/>
-          <a:p>
-            <a:pPr>
-              <a:lnSpc>
-                <a:spcPts val="1500"/>
-              </a:lnSpc>
-              <a:spcAft>
-                <a:spcPts val="200"/>
-              </a:spcAft>
-              <a:defRPr sz="1200" b="1">
-                <a:solidFill>
-                  <a:srgbClr val="FF6B35"/>
-                </a:solidFill>
-                <a:latin typeface="Microsoft YaHei"/>
-              </a:defRPr>
-            </a:pPr>
-            <a:r>
-              <a:t>▎AI 辅助开发核心作用</a:t>
-            </a:r>
-          </a:p>
-          <a:p>
-            <a:pPr>
-              <a:lnSpc>
-                <a:spcPts val="1500"/>
-              </a:lnSpc>
-              <a:spcAft>
-                <a:spcPts val="200"/>
-              </a:spcAft>
-              <a:defRPr sz="1000">
-                <a:solidFill>
-                  <a:srgbClr val="2D2D2D"/>
-                </a:solidFill>
-                <a:latin typeface="Microsoft YaHei"/>
-              </a:defRPr>
-            </a:pPr>
-            <a:r>
-              <a:t>• 提高效率：快速梳理需求、生成接口清单、辅助 SQL 与文档</a:t>
-            </a:r>
-          </a:p>
-          <a:p>
-            <a:pPr>
-              <a:lnSpc>
-                <a:spcPts val="1500"/>
-              </a:lnSpc>
-              <a:spcAft>
-                <a:spcPts val="200"/>
-              </a:spcAft>
-              <a:defRPr sz="1000">
-                <a:solidFill>
-                  <a:srgbClr val="2D2D2D"/>
-                </a:solidFill>
-                <a:latin typeface="Microsoft YaHei"/>
-              </a:defRPr>
-            </a:pPr>
-            <a:r>
-              <a:t>• 辅助学习：解释 JWT、MyBatis-Plus、Vue Router、Pinia 等技术点</a:t>
-            </a:r>
-          </a:p>
-          <a:p>
-            <a:pPr>
-              <a:lnSpc>
-                <a:spcPts val="1500"/>
-              </a:lnSpc>
-              <a:spcAft>
-                <a:spcPts val="200"/>
-              </a:spcAft>
-              <a:defRPr sz="1000">
-                <a:solidFill>
-                  <a:srgbClr val="2D2D2D"/>
-                </a:solidFill>
-                <a:latin typeface="Microsoft YaHei"/>
-              </a:defRPr>
-            </a:pPr>
-            <a:r>
-              <a:t>• 规范流程：把需求分析、数据库设计、接口设计、测试记录串成完整报告</a:t>
-            </a:r>
-          </a:p>
-          <a:p>
-            <a:pPr>
-              <a:lnSpc>
-                <a:spcPts val="1500"/>
-              </a:lnSpc>
-              <a:spcAft>
-                <a:spcPts val="200"/>
-              </a:spcAft>
-              <a:defRPr sz="1000">
-                <a:solidFill>
-                  <a:srgbClr val="2D2D2D"/>
-                </a:solidFill>
-                <a:latin typeface="Microsoft YaHei"/>
-              </a:defRPr>
-            </a:pPr>
-            <a:r>
-              <a:t>• 保持主导：核心业务理解、代码调试、数据验证和答辩表达仍需自己完成</a:t>
-            </a:r>
-          </a:p>
-        </p:txBody>
-      </p:sp>
-      <p:sp>
-        <p:nvSpPr>
           <p:cNvPr id="11" name="Rounded Rectangle 10"/>
           <p:cNvSpPr/>
           <p:nvPr/>
@@ -27207,14 +26564,6 @@
 <file path=ppt/slides/slide3.xml><?xml version="1.0" encoding="utf-8"?>
 <p:sld xmlns:a="http://schemas.openxmlformats.org/drawingml/2006/main" xmlns:p="http://schemas.openxmlformats.org/presentationml/2006/main" xmlns:r="http://schemas.openxmlformats.org/officeDocument/2006/relationships">
   <p:cSld>
-    <p:bg>
-      <p:bgPr>
-        <a:solidFill>
-          <a:srgbClr val="3D2B1F"/>
-        </a:solidFill>
-        <a:effectLst/>
-      </p:bgPr>
-    </p:bg>
     <p:spTree>
       <p:nvGrpSpPr>
         <p:cNvPr id="1" name=""/>
@@ -27513,7 +26862,7 @@
               </a:defRPr>
             </a:pPr>
             <a:r>
-              <a:t>2/28</a:t>
+              <a:t>2/27</a:t>
             </a:r>
           </a:p>
         </p:txBody>
@@ -27529,14 +26878,6 @@
 <file path=ppt/slides/slide4.xml><?xml version="1.0" encoding="utf-8"?>
 <p:sld xmlns:a="http://schemas.openxmlformats.org/drawingml/2006/main" xmlns:p="http://schemas.openxmlformats.org/presentationml/2006/main" xmlns:r="http://schemas.openxmlformats.org/officeDocument/2006/relationships">
   <p:cSld>
-    <p:bg>
-      <p:bgPr>
-        <a:solidFill>
-          <a:srgbClr val="FFFAF5"/>
-        </a:solidFill>
-        <a:effectLst/>
-      </p:bgPr>
-    </p:bg>
     <p:spTree>
       <p:nvGrpSpPr>
         <p:cNvPr id="1" name=""/>
@@ -27833,7 +27174,7 @@
               </a:defRPr>
             </a:pPr>
             <a:r>
-              <a:t>3/28</a:t>
+              <a:t>3/27</a:t>
             </a:r>
           </a:p>
         </p:txBody>
@@ -28920,14 +28261,6 @@
 <file path=ppt/slides/slide5.xml><?xml version="1.0" encoding="utf-8"?>
 <p:sld xmlns:a="http://schemas.openxmlformats.org/drawingml/2006/main" xmlns:p="http://schemas.openxmlformats.org/presentationml/2006/main" xmlns:r="http://schemas.openxmlformats.org/officeDocument/2006/relationships">
   <p:cSld>
-    <p:bg>
-      <p:bgPr>
-        <a:solidFill>
-          <a:srgbClr val="FFFAF5"/>
-        </a:solidFill>
-        <a:effectLst/>
-      </p:bgPr>
-    </p:bg>
     <p:spTree>
       <p:nvGrpSpPr>
         <p:cNvPr id="1" name=""/>
@@ -29224,7 +28557,7 @@
               </a:defRPr>
             </a:pPr>
             <a:r>
-              <a:t>4/28</a:t>
+              <a:t>4/27</a:t>
             </a:r>
           </a:p>
         </p:txBody>
@@ -30338,14 +29671,6 @@
 <file path=ppt/slides/slide6.xml><?xml version="1.0" encoding="utf-8"?>
 <p:sld xmlns:a="http://schemas.openxmlformats.org/drawingml/2006/main" xmlns:p="http://schemas.openxmlformats.org/presentationml/2006/main" xmlns:r="http://schemas.openxmlformats.org/officeDocument/2006/relationships">
   <p:cSld>
-    <p:bg>
-      <p:bgPr>
-        <a:solidFill>
-          <a:srgbClr val="FFFAF5"/>
-        </a:solidFill>
-        <a:effectLst/>
-      </p:bgPr>
-    </p:bg>
     <p:spTree>
       <p:nvGrpSpPr>
         <p:cNvPr id="1" name=""/>
@@ -30642,7 +29967,7 @@
               </a:defRPr>
             </a:pPr>
             <a:r>
-              <a:t>5/28</a:t>
+              <a:t>5/27</a:t>
             </a:r>
           </a:p>
         </p:txBody>
@@ -31351,14 +30676,6 @@
 <file path=ppt/slides/slide7.xml><?xml version="1.0" encoding="utf-8"?>
 <p:sld xmlns:a="http://schemas.openxmlformats.org/drawingml/2006/main" xmlns:p="http://schemas.openxmlformats.org/presentationml/2006/main" xmlns:r="http://schemas.openxmlformats.org/officeDocument/2006/relationships">
   <p:cSld>
-    <p:bg>
-      <p:bgPr>
-        <a:solidFill>
-          <a:srgbClr val="FFFAF5"/>
-        </a:solidFill>
-        <a:effectLst/>
-      </p:bgPr>
-    </p:bg>
     <p:spTree>
       <p:nvGrpSpPr>
         <p:cNvPr id="1" name=""/>
@@ -31655,7 +30972,7 @@
               </a:defRPr>
             </a:pPr>
             <a:r>
-              <a:t>6/28</a:t>
+              <a:t>6/27</a:t>
             </a:r>
           </a:p>
         </p:txBody>
@@ -32851,14 +32168,6 @@
 <file path=ppt/slides/slide8.xml><?xml version="1.0" encoding="utf-8"?>
 <p:sld xmlns:a="http://schemas.openxmlformats.org/drawingml/2006/main" xmlns:p="http://schemas.openxmlformats.org/presentationml/2006/main" xmlns:r="http://schemas.openxmlformats.org/officeDocument/2006/relationships">
   <p:cSld>
-    <p:bg>
-      <p:bgPr>
-        <a:solidFill>
-          <a:srgbClr val="3D2B1F"/>
-        </a:solidFill>
-        <a:effectLst/>
-      </p:bgPr>
-    </p:bg>
     <p:spTree>
       <p:nvGrpSpPr>
         <p:cNvPr id="1" name=""/>
@@ -33157,7 +32466,7 @@
               </a:defRPr>
             </a:pPr>
             <a:r>
-              <a:t>7/28</a:t>
+              <a:t>7/27</a:t>
             </a:r>
           </a:p>
         </p:txBody>
@@ -33173,14 +32482,6 @@
 <file path=ppt/slides/slide9.xml><?xml version="1.0" encoding="utf-8"?>
 <p:sld xmlns:a="http://schemas.openxmlformats.org/drawingml/2006/main" xmlns:p="http://schemas.openxmlformats.org/presentationml/2006/main" xmlns:r="http://schemas.openxmlformats.org/officeDocument/2006/relationships">
   <p:cSld>
-    <p:bg>
-      <p:bgPr>
-        <a:solidFill>
-          <a:srgbClr val="FFFAF5"/>
-        </a:solidFill>
-        <a:effectLst/>
-      </p:bgPr>
-    </p:bg>
     <p:spTree>
       <p:nvGrpSpPr>
         <p:cNvPr id="1" name=""/>
@@ -33477,7 +32778,7 @@
               </a:defRPr>
             </a:pPr>
             <a:r>
-              <a:t>8/28</a:t>
+              <a:t>8/27</a:t>
             </a:r>
           </a:p>
         </p:txBody>
